--- a/Setup_Angular_Node.pptx
+++ b/Setup_Angular_Node.pptx
@@ -9372,7 +9372,7 @@
           <a:p>
             <a:fld id="{5BCAD085-E8A6-8845-BD4E-CB4CCA059FC4}" type="datetimeFigureOut">
               <a:rPr lang="en-US" smtClean="0"/>
-              <a:t>6/27/2025</a:t>
+              <a:t>7/1/2025</a:t>
             </a:fld>
             <a:endParaRPr lang="en-US"/>
           </a:p>
@@ -9647,7 +9647,7 @@
           <a:p>
             <a:fld id="{5BCAD085-E8A6-8845-BD4E-CB4CCA059FC4}" type="datetimeFigureOut">
               <a:rPr lang="en-US" smtClean="0"/>
-              <a:t>6/27/2025</a:t>
+              <a:t>7/1/2025</a:t>
             </a:fld>
             <a:endParaRPr lang="en-US"/>
           </a:p>
@@ -9841,7 +9841,7 @@
           <a:p>
             <a:fld id="{5BCAD085-E8A6-8845-BD4E-CB4CCA059FC4}" type="datetimeFigureOut">
               <a:rPr lang="en-US" smtClean="0"/>
-              <a:t>6/27/2025</a:t>
+              <a:t>7/1/2025</a:t>
             </a:fld>
             <a:endParaRPr lang="en-US"/>
           </a:p>
@@ -10114,7 +10114,7 @@
           <a:p>
             <a:fld id="{5BCAD085-E8A6-8845-BD4E-CB4CCA059FC4}" type="datetimeFigureOut">
               <a:rPr lang="en-US" smtClean="0"/>
-              <a:t>6/27/2025</a:t>
+              <a:t>7/1/2025</a:t>
             </a:fld>
             <a:endParaRPr lang="en-US"/>
           </a:p>
@@ -10455,7 +10455,7 @@
           <a:p>
             <a:fld id="{5BCAD085-E8A6-8845-BD4E-CB4CCA059FC4}" type="datetimeFigureOut">
               <a:rPr lang="en-US" smtClean="0"/>
-              <a:t>6/27/2025</a:t>
+              <a:t>7/1/2025</a:t>
             </a:fld>
             <a:endParaRPr lang="en-US"/>
           </a:p>
@@ -11078,7 +11078,7 @@
           <a:p>
             <a:fld id="{5BCAD085-E8A6-8845-BD4E-CB4CCA059FC4}" type="datetimeFigureOut">
               <a:rPr lang="en-US" smtClean="0"/>
-              <a:t>6/27/2025</a:t>
+              <a:t>7/1/2025</a:t>
             </a:fld>
             <a:endParaRPr lang="en-US"/>
           </a:p>
@@ -11938,7 +11938,7 @@
           <a:p>
             <a:fld id="{5BCAD085-E8A6-8845-BD4E-CB4CCA059FC4}" type="datetimeFigureOut">
               <a:rPr lang="en-US" smtClean="0"/>
-              <a:t>6/27/2025</a:t>
+              <a:t>7/1/2025</a:t>
             </a:fld>
             <a:endParaRPr lang="en-US"/>
           </a:p>
@@ -12108,7 +12108,7 @@
           <a:p>
             <a:fld id="{5BCAD085-E8A6-8845-BD4E-CB4CCA059FC4}" type="datetimeFigureOut">
               <a:rPr lang="en-US" smtClean="0"/>
-              <a:t>6/27/2025</a:t>
+              <a:t>7/1/2025</a:t>
             </a:fld>
             <a:endParaRPr lang="en-US"/>
           </a:p>
@@ -12288,7 +12288,7 @@
           <a:p>
             <a:fld id="{5BCAD085-E8A6-8845-BD4E-CB4CCA059FC4}" type="datetimeFigureOut">
               <a:rPr lang="en-US" smtClean="0"/>
-              <a:t>6/27/2025</a:t>
+              <a:t>7/1/2025</a:t>
             </a:fld>
             <a:endParaRPr lang="en-US"/>
           </a:p>
@@ -12458,7 +12458,7 @@
           <a:p>
             <a:fld id="{5BCAD085-E8A6-8845-BD4E-CB4CCA059FC4}" type="datetimeFigureOut">
               <a:rPr lang="en-US" smtClean="0"/>
-              <a:t>6/27/2025</a:t>
+              <a:t>7/1/2025</a:t>
             </a:fld>
             <a:endParaRPr lang="en-US"/>
           </a:p>
@@ -12705,7 +12705,7 @@
           <a:p>
             <a:fld id="{5BCAD085-E8A6-8845-BD4E-CB4CCA059FC4}" type="datetimeFigureOut">
               <a:rPr lang="en-US" smtClean="0"/>
-              <a:t>6/27/2025</a:t>
+              <a:t>7/1/2025</a:t>
             </a:fld>
             <a:endParaRPr lang="en-US"/>
           </a:p>
@@ -12997,7 +12997,7 @@
           <a:p>
             <a:fld id="{5BCAD085-E8A6-8845-BD4E-CB4CCA059FC4}" type="datetimeFigureOut">
               <a:rPr lang="en-US" smtClean="0"/>
-              <a:t>6/27/2025</a:t>
+              <a:t>7/1/2025</a:t>
             </a:fld>
             <a:endParaRPr lang="en-US"/>
           </a:p>
@@ -13441,7 +13441,7 @@
           <a:p>
             <a:fld id="{5BCAD085-E8A6-8845-BD4E-CB4CCA059FC4}" type="datetimeFigureOut">
               <a:rPr lang="en-US" smtClean="0"/>
-              <a:t>6/27/2025</a:t>
+              <a:t>7/1/2025</a:t>
             </a:fld>
             <a:endParaRPr lang="en-US"/>
           </a:p>
@@ -13559,7 +13559,7 @@
           <a:p>
             <a:fld id="{5BCAD085-E8A6-8845-BD4E-CB4CCA059FC4}" type="datetimeFigureOut">
               <a:rPr lang="en-US" smtClean="0"/>
-              <a:t>6/27/2025</a:t>
+              <a:t>7/1/2025</a:t>
             </a:fld>
             <a:endParaRPr lang="en-US"/>
           </a:p>
@@ -13654,7 +13654,7 @@
           <a:p>
             <a:fld id="{5BCAD085-E8A6-8845-BD4E-CB4CCA059FC4}" type="datetimeFigureOut">
               <a:rPr lang="en-US" smtClean="0"/>
-              <a:t>6/27/2025</a:t>
+              <a:t>7/1/2025</a:t>
             </a:fld>
             <a:endParaRPr lang="en-US"/>
           </a:p>
@@ -13933,7 +13933,7 @@
           <a:p>
             <a:fld id="{5BCAD085-E8A6-8845-BD4E-CB4CCA059FC4}" type="datetimeFigureOut">
               <a:rPr lang="en-US" smtClean="0"/>
-              <a:t>6/27/2025</a:t>
+              <a:t>7/1/2025</a:t>
             </a:fld>
             <a:endParaRPr lang="en-US"/>
           </a:p>
@@ -14208,7 +14208,7 @@
           <a:p>
             <a:fld id="{5BCAD085-E8A6-8845-BD4E-CB4CCA059FC4}" type="datetimeFigureOut">
               <a:rPr lang="en-US" smtClean="0"/>
-              <a:t>6/27/2025</a:t>
+              <a:t>7/1/2025</a:t>
             </a:fld>
             <a:endParaRPr lang="en-US"/>
           </a:p>
@@ -14637,7 +14637,7 @@
           <a:p>
             <a:fld id="{5BCAD085-E8A6-8845-BD4E-CB4CCA059FC4}" type="datetimeFigureOut">
               <a:rPr lang="en-US" smtClean="0"/>
-              <a:t>6/27/2025</a:t>
+              <a:t>7/1/2025</a:t>
             </a:fld>
             <a:endParaRPr lang="en-US"/>
           </a:p>
@@ -15460,6 +15460,36 @@
           </a:prstGeom>
         </p:spPr>
       </p:pic>
+      <p:pic>
+        <p:nvPicPr>
+          <p:cNvPr id="6" name="Immagine 5">
+            <a:extLst>
+              <a:ext uri="{FF2B5EF4-FFF2-40B4-BE49-F238E27FC236}">
+                <a16:creationId xmlns:a16="http://schemas.microsoft.com/office/drawing/2014/main" id="{6F2FE6EE-9D06-B3A7-0235-A39D69ADF27F}"/>
+              </a:ext>
+            </a:extLst>
+          </p:cNvPr>
+          <p:cNvPicPr>
+            <a:picLocks noChangeAspect="1"/>
+          </p:cNvPicPr>
+          <p:nvPr/>
+        </p:nvPicPr>
+        <p:blipFill>
+          <a:blip r:embed="rId4"/>
+          <a:stretch>
+            <a:fillRect/>
+          </a:stretch>
+        </p:blipFill>
+        <p:spPr>
+          <a:xfrm>
+            <a:off x="0" y="0"/>
+            <a:ext cx="7563906" cy="581106"/>
+          </a:xfrm>
+          <a:prstGeom prst="rect">
+            <a:avLst/>
+          </a:prstGeom>
+        </p:spPr>
+      </p:pic>
     </p:spTree>
   </p:cSld>
   <p:clrMapOvr>
@@ -15744,6 +15774,36 @@
           </a:prstGeom>
         </p:spPr>
       </p:pic>
+      <p:pic>
+        <p:nvPicPr>
+          <p:cNvPr id="6" name="Immagine 5">
+            <a:extLst>
+              <a:ext uri="{FF2B5EF4-FFF2-40B4-BE49-F238E27FC236}">
+                <a16:creationId xmlns:a16="http://schemas.microsoft.com/office/drawing/2014/main" id="{7B4926C1-68DC-9890-8FD2-CF2835D9D7BC}"/>
+              </a:ext>
+            </a:extLst>
+          </p:cNvPr>
+          <p:cNvPicPr>
+            <a:picLocks noChangeAspect="1"/>
+          </p:cNvPicPr>
+          <p:nvPr/>
+        </p:nvPicPr>
+        <p:blipFill>
+          <a:blip r:embed="rId9"/>
+          <a:stretch>
+            <a:fillRect/>
+          </a:stretch>
+        </p:blipFill>
+        <p:spPr>
+          <a:xfrm>
+            <a:off x="0" y="29487"/>
+            <a:ext cx="7563906" cy="581106"/>
+          </a:xfrm>
+          <a:prstGeom prst="rect">
+            <a:avLst/>
+          </a:prstGeom>
+        </p:spPr>
+      </p:pic>
     </p:spTree>
   </p:cSld>
   <p:clrMapOvr>
@@ -16019,6 +16079,36 @@
           <a:xfrm>
             <a:off x="9807575" y="-117158"/>
             <a:ext cx="2381250" cy="2428875"/>
+          </a:xfrm>
+          <a:prstGeom prst="rect">
+            <a:avLst/>
+          </a:prstGeom>
+        </p:spPr>
+      </p:pic>
+      <p:pic>
+        <p:nvPicPr>
+          <p:cNvPr id="5" name="Immagine 4">
+            <a:extLst>
+              <a:ext uri="{FF2B5EF4-FFF2-40B4-BE49-F238E27FC236}">
+                <a16:creationId xmlns:a16="http://schemas.microsoft.com/office/drawing/2014/main" id="{CDCFC417-7CDA-5D33-8E47-2B9E9273CC9F}"/>
+              </a:ext>
+            </a:extLst>
+          </p:cNvPr>
+          <p:cNvPicPr>
+            <a:picLocks noChangeAspect="1"/>
+          </p:cNvPicPr>
+          <p:nvPr/>
+        </p:nvPicPr>
+        <p:blipFill>
+          <a:blip r:embed="rId4"/>
+          <a:stretch>
+            <a:fillRect/>
+          </a:stretch>
+        </p:blipFill>
+        <p:spPr>
+          <a:xfrm>
+            <a:off x="0" y="0"/>
+            <a:ext cx="7563906" cy="581106"/>
           </a:xfrm>
           <a:prstGeom prst="rect">
             <a:avLst/>
@@ -16181,6 +16271,36 @@
           </a:graphicData>
         </a:graphic>
       </p:graphicFrame>
+      <p:pic>
+        <p:nvPicPr>
+          <p:cNvPr id="4" name="Immagine 3">
+            <a:extLst>
+              <a:ext uri="{FF2B5EF4-FFF2-40B4-BE49-F238E27FC236}">
+                <a16:creationId xmlns:a16="http://schemas.microsoft.com/office/drawing/2014/main" id="{1B2DC950-8DE0-09AC-BFDB-3D5678A89D3A}"/>
+              </a:ext>
+            </a:extLst>
+          </p:cNvPr>
+          <p:cNvPicPr>
+            <a:picLocks noChangeAspect="1"/>
+          </p:cNvPicPr>
+          <p:nvPr/>
+        </p:nvPicPr>
+        <p:blipFill>
+          <a:blip r:embed="rId9"/>
+          <a:stretch>
+            <a:fillRect/>
+          </a:stretch>
+        </p:blipFill>
+        <p:spPr>
+          <a:xfrm>
+            <a:off x="0" y="8442"/>
+            <a:ext cx="7563906" cy="581106"/>
+          </a:xfrm>
+          <a:prstGeom prst="rect">
+            <a:avLst/>
+          </a:prstGeom>
+        </p:spPr>
+      </p:pic>
     </p:spTree>
   </p:cSld>
   <p:clrMapOvr>
@@ -16337,6 +16457,36 @@
           </a:graphicData>
         </a:graphic>
       </p:graphicFrame>
+      <p:pic>
+        <p:nvPicPr>
+          <p:cNvPr id="4" name="Immagine 3">
+            <a:extLst>
+              <a:ext uri="{FF2B5EF4-FFF2-40B4-BE49-F238E27FC236}">
+                <a16:creationId xmlns:a16="http://schemas.microsoft.com/office/drawing/2014/main" id="{646EA044-DB06-07D0-CF4F-08BFF559E777}"/>
+              </a:ext>
+            </a:extLst>
+          </p:cNvPr>
+          <p:cNvPicPr>
+            <a:picLocks noChangeAspect="1"/>
+          </p:cNvPicPr>
+          <p:nvPr/>
+        </p:nvPicPr>
+        <p:blipFill>
+          <a:blip r:embed="rId9"/>
+          <a:stretch>
+            <a:fillRect/>
+          </a:stretch>
+        </p:blipFill>
+        <p:spPr>
+          <a:xfrm>
+            <a:off x="0" y="-29091"/>
+            <a:ext cx="7563906" cy="581106"/>
+          </a:xfrm>
+          <a:prstGeom prst="rect">
+            <a:avLst/>
+          </a:prstGeom>
+        </p:spPr>
+      </p:pic>
     </p:spTree>
   </p:cSld>
   <p:clrMapOvr>
@@ -16648,6 +16798,36 @@
           </a:prstGeom>
         </p:spPr>
       </p:pic>
+      <p:pic>
+        <p:nvPicPr>
+          <p:cNvPr id="6" name="Immagine 5">
+            <a:extLst>
+              <a:ext uri="{FF2B5EF4-FFF2-40B4-BE49-F238E27FC236}">
+                <a16:creationId xmlns:a16="http://schemas.microsoft.com/office/drawing/2014/main" id="{9D9CF884-0B5E-C37B-6EB0-C69CA10386CE}"/>
+              </a:ext>
+            </a:extLst>
+          </p:cNvPr>
+          <p:cNvPicPr>
+            <a:picLocks noChangeAspect="1"/>
+          </p:cNvPicPr>
+          <p:nvPr/>
+        </p:nvPicPr>
+        <p:blipFill>
+          <a:blip r:embed="rId4"/>
+          <a:stretch>
+            <a:fillRect/>
+          </a:stretch>
+        </p:blipFill>
+        <p:spPr>
+          <a:xfrm>
+            <a:off x="0" y="-7219"/>
+            <a:ext cx="7563906" cy="581106"/>
+          </a:xfrm>
+          <a:prstGeom prst="rect">
+            <a:avLst/>
+          </a:prstGeom>
+        </p:spPr>
+      </p:pic>
     </p:spTree>
   </p:cSld>
   <p:clrMapOvr>
@@ -16941,6 +17121,36 @@
           </a:prstGeom>
         </p:spPr>
       </p:pic>
+      <p:pic>
+        <p:nvPicPr>
+          <p:cNvPr id="6" name="Immagine 5">
+            <a:extLst>
+              <a:ext uri="{FF2B5EF4-FFF2-40B4-BE49-F238E27FC236}">
+                <a16:creationId xmlns:a16="http://schemas.microsoft.com/office/drawing/2014/main" id="{DB138679-4D7F-3BA7-5BAF-DB8AFABDE601}"/>
+              </a:ext>
+            </a:extLst>
+          </p:cNvPr>
+          <p:cNvPicPr>
+            <a:picLocks noChangeAspect="1"/>
+          </p:cNvPicPr>
+          <p:nvPr/>
+        </p:nvPicPr>
+        <p:blipFill>
+          <a:blip r:embed="rId5"/>
+          <a:stretch>
+            <a:fillRect/>
+          </a:stretch>
+        </p:blipFill>
+        <p:spPr>
+          <a:xfrm>
+            <a:off x="0" y="0"/>
+            <a:ext cx="7563906" cy="581106"/>
+          </a:xfrm>
+          <a:prstGeom prst="rect">
+            <a:avLst/>
+          </a:prstGeom>
+        </p:spPr>
+      </p:pic>
     </p:spTree>
   </p:cSld>
   <p:clrMapOvr>
@@ -17224,6 +17434,36 @@
           </a:prstGeom>
         </p:spPr>
       </p:pic>
+      <p:pic>
+        <p:nvPicPr>
+          <p:cNvPr id="6" name="Immagine 5">
+            <a:extLst>
+              <a:ext uri="{FF2B5EF4-FFF2-40B4-BE49-F238E27FC236}">
+                <a16:creationId xmlns:a16="http://schemas.microsoft.com/office/drawing/2014/main" id="{D7EB8468-4EA2-D837-68BC-EE95DDC379FB}"/>
+              </a:ext>
+            </a:extLst>
+          </p:cNvPr>
+          <p:cNvPicPr>
+            <a:picLocks noChangeAspect="1"/>
+          </p:cNvPicPr>
+          <p:nvPr/>
+        </p:nvPicPr>
+        <p:blipFill>
+          <a:blip r:embed="rId4"/>
+          <a:stretch>
+            <a:fillRect/>
+          </a:stretch>
+        </p:blipFill>
+        <p:spPr>
+          <a:xfrm>
+            <a:off x="0" y="6627"/>
+            <a:ext cx="7563906" cy="581106"/>
+          </a:xfrm>
+          <a:prstGeom prst="rect">
+            <a:avLst/>
+          </a:prstGeom>
+        </p:spPr>
+      </p:pic>
     </p:spTree>
   </p:cSld>
   <p:clrMapOvr>
@@ -17481,6 +17721,36 @@
           <a:xfrm>
             <a:off x="9889674" y="0"/>
             <a:ext cx="2381250" cy="2428875"/>
+          </a:xfrm>
+          <a:prstGeom prst="rect">
+            <a:avLst/>
+          </a:prstGeom>
+        </p:spPr>
+      </p:pic>
+      <p:pic>
+        <p:nvPicPr>
+          <p:cNvPr id="6" name="Immagine 5">
+            <a:extLst>
+              <a:ext uri="{FF2B5EF4-FFF2-40B4-BE49-F238E27FC236}">
+                <a16:creationId xmlns:a16="http://schemas.microsoft.com/office/drawing/2014/main" id="{AC35DC74-FC27-4095-54BC-220438914462}"/>
+              </a:ext>
+            </a:extLst>
+          </p:cNvPr>
+          <p:cNvPicPr>
+            <a:picLocks noChangeAspect="1"/>
+          </p:cNvPicPr>
+          <p:nvPr/>
+        </p:nvPicPr>
+        <p:blipFill>
+          <a:blip r:embed="rId4"/>
+          <a:stretch>
+            <a:fillRect/>
+          </a:stretch>
+        </p:blipFill>
+        <p:spPr>
+          <a:xfrm>
+            <a:off x="0" y="29487"/>
+            <a:ext cx="7563906" cy="581106"/>
           </a:xfrm>
           <a:prstGeom prst="rect">
             <a:avLst/>
@@ -17643,6 +17913,36 @@
           </a:graphicData>
         </a:graphic>
       </p:graphicFrame>
+      <p:pic>
+        <p:nvPicPr>
+          <p:cNvPr id="4" name="Immagine 3">
+            <a:extLst>
+              <a:ext uri="{FF2B5EF4-FFF2-40B4-BE49-F238E27FC236}">
+                <a16:creationId xmlns:a16="http://schemas.microsoft.com/office/drawing/2014/main" id="{A59AD9A4-B491-B056-E0F6-866EE3F1CD37}"/>
+              </a:ext>
+            </a:extLst>
+          </p:cNvPr>
+          <p:cNvPicPr>
+            <a:picLocks noChangeAspect="1"/>
+          </p:cNvPicPr>
+          <p:nvPr/>
+        </p:nvPicPr>
+        <p:blipFill>
+          <a:blip r:embed="rId9"/>
+          <a:stretch>
+            <a:fillRect/>
+          </a:stretch>
+        </p:blipFill>
+        <p:spPr>
+          <a:xfrm>
+            <a:off x="0" y="12643"/>
+            <a:ext cx="7563906" cy="581106"/>
+          </a:xfrm>
+          <a:prstGeom prst="rect">
+            <a:avLst/>
+          </a:prstGeom>
+        </p:spPr>
+      </p:pic>
     </p:spTree>
   </p:cSld>
   <p:clrMapOvr>
